--- a/slides/agentic-coding-101.pptx
+++ b/slides/agentic-coding-101.pptx
@@ -622,7 +622,7 @@
           <a:p>
             <a:r>
               <a:rPr lang="en-US" dirty="0"/>
-              <a:t>In the tour (0:10–0:25) we install Addy Osmani's agent-skills together so everyone has a shared, real library. Skills are the lightest customisation: a markdown file with frontmatter. Attendees author their own in Station 6.</a:t>
+              <a:t>In the tour (0:10–0:25) we add Addy Osmani's agent-skills together: clone the pack and copy a couple of skill folders into the repo's .github/skills/ (it is not a Copilot marketplace, so there is no /plugin install for it). Skills are the lightest customisation: a markdown file with frontmatter. Attendees author their own in Station 6.</a:t>
             </a:r>
             <a:endParaRPr lang="en-US" dirty="0"/>
           </a:p>
@@ -710,7 +710,7 @@
           <a:p>
             <a:r>
               <a:rPr lang="en-US" dirty="0"/>
-              <a:t>Plugins are how a bank platform team packages house rules and ships them to everyone with one install command. The demo-repo ships a sample security-reviewer.agent.md to show the shape of a custom agent.</a:t>
+              <a:t>Plugins are how a bank platform team packages house rules and ships them to everyone. Note the mechanism: /plugin install is a Copilot-CLI command and only resolves repos that publish a marketplace.json; the app enables plugins via .github/copilot/settings.json. The demo-repo ships a sample security-reviewer.agent.md to show the shape of a custom agent.</a:t>
             </a:r>
             <a:endParaRPr lang="en-US" dirty="0"/>
           </a:p>
@@ -4178,8 +4178,8 @@
         </p:nvSpPr>
         <p:spPr>
           <a:xfrm>
-            <a:off x="548640" y="2057400"/>
-            <a:ext cx="11094415" cy="2011680"/>
+            <a:off x="548640" y="2011680"/>
+            <a:ext cx="11094415" cy="2148840"/>
           </a:xfrm>
           <a:prstGeom prst="rect">
             <a:avLst/>
@@ -4193,13 +4193,13 @@
           <a:p>
             <a:pPr marL="203200" indent="-203200">
               <a:spcAft>
-                <a:spcPts val="800"/>
+                <a:spcPts val="700"/>
               </a:spcAft>
               <a:buSzPct val="100000"/>
               <a:buChar char="•"/>
             </a:pPr>
             <a:r>
-              <a:rPr lang="en-US" sz="1600" dirty="0">
+              <a:rPr lang="en-US" sz="1500" dirty="0">
                 <a:solidFill>
                   <a:srgbClr val="16233A"/>
                 </a:solidFill>
@@ -4209,18 +4209,18 @@
               </a:rPr>
               <a:t>A SKILL.md with YAML frontmatter (name, description).</a:t>
             </a:r>
-            <a:endParaRPr lang="en-US" sz="1600" dirty="0"/>
+            <a:endParaRPr lang="en-US" sz="1500" dirty="0"/>
           </a:p>
           <a:p>
             <a:pPr marL="203200" indent="-203200">
               <a:spcAft>
-                <a:spcPts val="800"/>
+                <a:spcPts val="700"/>
               </a:spcAft>
               <a:buSzPct val="100000"/>
               <a:buChar char="•"/>
             </a:pPr>
             <a:r>
-              <a:rPr lang="en-US" sz="1600" dirty="0">
+              <a:rPr lang="en-US" sz="1500" dirty="0">
                 <a:solidFill>
                   <a:srgbClr val="16233A"/>
                 </a:solidFill>
@@ -4230,18 +4230,18 @@
               </a:rPr>
               <a:t>Loaded on demand when the task matches.</a:t>
             </a:r>
-            <a:endParaRPr lang="en-US" sz="1600" dirty="0"/>
+            <a:endParaRPr lang="en-US" sz="1500" dirty="0"/>
           </a:p>
           <a:p>
             <a:pPr marL="203200" indent="-203200">
               <a:spcAft>
-                <a:spcPts val="800"/>
+                <a:spcPts val="700"/>
               </a:spcAft>
               <a:buSzPct val="100000"/>
               <a:buChar char="•"/>
             </a:pPr>
             <a:r>
-              <a:rPr lang="en-US" sz="1600" dirty="0">
+              <a:rPr lang="en-US" sz="1500" dirty="0">
                 <a:solidFill>
                   <a:srgbClr val="16233A"/>
                 </a:solidFill>
@@ -4251,7 +4251,28 @@
               </a:rPr>
               <a:t>Community: Addy Osmani agent-skills (24 lifecycle skills), Matt Pocock short-form skills, github/awesome-copilot.</a:t>
             </a:r>
-            <a:endParaRPr lang="en-US" sz="1600" dirty="0"/>
+            <a:endParaRPr lang="en-US" sz="1500" dirty="0"/>
+          </a:p>
+          <a:p>
+            <a:pPr marL="203200" indent="-203200">
+              <a:spcAft>
+                <a:spcPts val="700"/>
+              </a:spcAft>
+              <a:buSzPct val="100000"/>
+              <a:buChar char="•"/>
+            </a:pPr>
+            <a:r>
+              <a:rPr lang="en-US" sz="1500" dirty="0">
+                <a:solidFill>
+                  <a:srgbClr val="16233A"/>
+                </a:solidFill>
+                <a:latin typeface="Calibri" pitchFamily="34" charset="0"/>
+                <a:ea typeface="Calibri" pitchFamily="34" charset="-122"/>
+                <a:cs typeface="Calibri" pitchFamily="34" charset="-120"/>
+              </a:rPr>
+              <a:t>Add a pack: copy skill folders into .github/skills/ — no marketplace needed.</a:t>
+            </a:r>
+            <a:endParaRPr lang="en-US" sz="1500" dirty="0"/>
           </a:p>
         </p:txBody>
       </p:sp>
@@ -4263,12 +4284,12 @@
         </p:nvSpPr>
         <p:spPr>
           <a:xfrm>
-            <a:off x="548640" y="4297680"/>
-            <a:ext cx="11094415" cy="1280160"/>
+            <a:off x="548640" y="4343400"/>
+            <a:ext cx="11094415" cy="1234440"/>
           </a:xfrm>
           <a:prstGeom prst="roundRect">
             <a:avLst>
-              <a:gd name="adj" fmla="val 3571"/>
+              <a:gd name="adj" fmla="val 3704"/>
             </a:avLst>
           </a:prstGeom>
           <a:solidFill>
@@ -4290,8 +4311,8 @@
         </p:nvSpPr>
         <p:spPr>
           <a:xfrm>
-            <a:off x="676656" y="4343400"/>
-            <a:ext cx="10838383" cy="1188720"/>
+            <a:off x="676656" y="4389120"/>
+            <a:ext cx="10838383" cy="1143000"/>
           </a:xfrm>
           <a:prstGeom prst="rect">
             <a:avLst/>
@@ -4522,7 +4543,7 @@
         <p:spPr>
           <a:xfrm>
             <a:off x="548640" y="2194560"/>
-            <a:ext cx="11094415" cy="2743200"/>
+            <a:ext cx="11094415" cy="2926080"/>
           </a:xfrm>
           <a:prstGeom prst="rect">
             <a:avLst/>
@@ -4536,13 +4557,13 @@
           <a:p>
             <a:pPr marL="203200" indent="-203200">
               <a:spcAft>
-                <a:spcPts val="1200"/>
+                <a:spcPts val="1100"/>
               </a:spcAft>
               <a:buSzPct val="100000"/>
               <a:buChar char="•"/>
             </a:pPr>
             <a:r>
-              <a:rPr lang="en-US" sz="1800" dirty="0">
+              <a:rPr lang="en-US" sz="1700" dirty="0">
                 <a:solidFill>
                   <a:srgbClr val="16233A"/>
                 </a:solidFill>
@@ -4552,18 +4573,18 @@
               </a:rPr>
               <a:t>Custom agents: *.agent.md</a:t>
             </a:r>
-            <a:endParaRPr lang="en-US" sz="1800" dirty="0"/>
+            <a:endParaRPr lang="en-US" sz="1700" dirty="0"/>
           </a:p>
           <a:p>
             <a:pPr marL="203200" indent="-203200">
               <a:spcAft>
-                <a:spcPts val="1200"/>
+                <a:spcPts val="1100"/>
               </a:spcAft>
               <a:buSzPct val="100000"/>
               <a:buChar char="•"/>
             </a:pPr>
             <a:r>
-              <a:rPr lang="en-US" sz="1800" dirty="0">
+              <a:rPr lang="en-US" sz="1700" dirty="0">
                 <a:solidFill>
                   <a:srgbClr val="16233A"/>
                 </a:solidFill>
@@ -4573,18 +4594,18 @@
               </a:rPr>
               <a:t>Hooks: hooks.json · MCP: .mcp.json / mcp.json</a:t>
             </a:r>
-            <a:endParaRPr lang="en-US" sz="1800" dirty="0"/>
+            <a:endParaRPr lang="en-US" sz="1700" dirty="0"/>
           </a:p>
           <a:p>
             <a:pPr marL="203200" indent="-203200">
               <a:spcAft>
-                <a:spcPts val="1200"/>
+                <a:spcPts val="1100"/>
               </a:spcAft>
               <a:buSzPct val="100000"/>
               <a:buChar char="•"/>
             </a:pPr>
             <a:r>
-              <a:rPr lang="en-US" sz="1800" dirty="0">
+              <a:rPr lang="en-US" sz="1700" dirty="0">
                 <a:solidFill>
                   <a:srgbClr val="16233A"/>
                 </a:solidFill>
@@ -4592,9 +4613,30 @@
                 <a:ea typeface="Calibri" pitchFamily="34" charset="-122"/>
                 <a:cs typeface="Calibri" pitchFamily="34" charset="-120"/>
               </a:rPr>
-              <a:t>Install: /plugin install owner/repo</a:t>
-            </a:r>
-            <a:endParaRPr lang="en-US" sz="1800" dirty="0"/>
+              <a:t>Install: /plugin install owner/repo (Copilot CLI; repo must be a marketplace).</a:t>
+            </a:r>
+            <a:endParaRPr lang="en-US" sz="1700" dirty="0"/>
+          </a:p>
+          <a:p>
+            <a:pPr marL="203200" indent="-203200">
+              <a:spcAft>
+                <a:spcPts val="1100"/>
+              </a:spcAft>
+              <a:buSzPct val="100000"/>
+              <a:buChar char="•"/>
+            </a:pPr>
+            <a:r>
+              <a:rPr lang="en-US" sz="1700" dirty="0">
+                <a:solidFill>
+                  <a:srgbClr val="16233A"/>
+                </a:solidFill>
+                <a:latin typeface="Calibri" pitchFamily="34" charset="0"/>
+                <a:ea typeface="Calibri" pitchFamily="34" charset="-122"/>
+                <a:cs typeface="Calibri" pitchFamily="34" charset="-120"/>
+              </a:rPr>
+              <a:t>App enables plugins via .github/copilot/settings.json.</a:t>
+            </a:r>
+            <a:endParaRPr lang="en-US" sz="1700" dirty="0"/>
           </a:p>
         </p:txBody>
       </p:sp>

--- a/slides/agentic-coding-101.pptx
+++ b/slides/agentic-coding-101.pptx
@@ -622,7 +622,7 @@
           <a:p>
             <a:r>
               <a:rPr lang="en-US" dirty="0"/>
-              <a:t>In the tour (0:10–0:25) we add Addy Osmani's agent-skills together: clone the pack and copy a couple of skill folders into the repo's .github/skills/ (it is not a Copilot marketplace, so there is no /plugin install for it). Skills are the lightest customisation: a markdown file with frontmatter. Attendees author their own in Station 6.</a:t>
+              <a:t>Two ways to get skills into a repo: drop folders under .github/skills/ (the app reads them), or install a plugin from a marketplace (next slide). In the tour (0:10–0:25) we install from our own marketplace, amilos/agentic-coding-101-marketplace, which bundles Addy Osmani's and Matt Pocock's packs. Attendees author their own in Station 6.</a:t>
             </a:r>
             <a:endParaRPr lang="en-US" dirty="0"/>
           </a:p>
@@ -710,7 +710,7 @@
           <a:p>
             <a:r>
               <a:rPr lang="en-US" dirty="0"/>
-              <a:t>Plugins are how a bank platform team packages house rules and ships them to everyone. Note the mechanism: /plugin install is a Copilot-CLI command and only resolves repos that publish a marketplace.json; the app enables plugins via .github/copilot/settings.json. The demo-repo ships a sample security-reviewer.agent.md to show the shape of a custom agent.</a:t>
+              <a:t>We publish a real marketplace, amilos/agentic-coding-101-marketplace, bundling Addy Osmani's (24) and Matt Pocock's (39) skills as two plugins — MIT, redistributed with attribution. Two commands and every session in the repo gains ~60 community skills. A plain skills repo is NOT a marketplace (no marketplace.json), which is why /plugin install owner/repo fails for those. The app can also enable plugins declaratively via .github/copilot/settings.json. The demo-repo ships a sample security-reviewer.agent.md to show the shape of a custom agent.</a:t>
             </a:r>
             <a:endParaRPr lang="en-US" dirty="0"/>
           </a:p>
@@ -4270,7 +4270,7 @@
                 <a:ea typeface="Calibri" pitchFamily="34" charset="-122"/>
                 <a:cs typeface="Calibri" pitchFamily="34" charset="-120"/>
               </a:rPr>
-              <a:t>Add a pack: copy skill folders into .github/skills/ — no marketplace needed.</a:t>
+              <a:t>Get them two ways: copy folders into .github/skills/, or install a plugin from a marketplace (next slide).</a:t>
             </a:r>
             <a:endParaRPr lang="en-US" sz="1500" dirty="0"/>
           </a:p>
@@ -4489,8 +4489,8 @@
         </p:nvSpPr>
         <p:spPr>
           <a:xfrm>
-            <a:off x="548640" y="1371600"/>
-            <a:ext cx="11094415" cy="502920"/>
+            <a:off x="548640" y="1325880"/>
+            <a:ext cx="11094415" cy="457200"/>
           </a:xfrm>
           <a:prstGeom prst="rect">
             <a:avLst/>
@@ -4506,7 +4506,7 @@
               <a:buNone/>
             </a:pPr>
             <a:r>
-              <a:rPr lang="en-US" sz="1800" b="1" dirty="0">
+              <a:rPr lang="en-US" sz="1700" b="1" dirty="0">
                 <a:solidFill>
                   <a:srgbClr val="1C5DC4"/>
                 </a:solidFill>
@@ -4520,7 +4520,7 @@
               <a:buNone/>
             </a:pPr>
             <a:r>
-              <a:rPr lang="en-US" sz="1800" dirty="0">
+              <a:rPr lang="en-US" sz="1700" dirty="0">
                 <a:solidFill>
                   <a:srgbClr val="16233A"/>
                 </a:solidFill>
@@ -4530,7 +4530,7 @@
               </a:rPr>
               <a:t> bundle custom agents, skills, hooks, MCP servers and LSP configs.</a:t>
             </a:r>
-            <a:endParaRPr lang="en-US" sz="1800" dirty="0"/>
+            <a:endParaRPr lang="en-US" sz="1700" dirty="0"/>
           </a:p>
         </p:txBody>
       </p:sp>
@@ -4542,8 +4542,8 @@
         </p:nvSpPr>
         <p:spPr>
           <a:xfrm>
-            <a:off x="548640" y="2194560"/>
-            <a:ext cx="11094415" cy="2926080"/>
+            <a:off x="548640" y="1920240"/>
+            <a:ext cx="11094415" cy="1417320"/>
           </a:xfrm>
           <a:prstGeom prst="rect">
             <a:avLst/>
@@ -4557,13 +4557,13 @@
           <a:p>
             <a:pPr marL="203200" indent="-203200">
               <a:spcAft>
-                <a:spcPts val="1100"/>
+                <a:spcPts val="900"/>
               </a:spcAft>
               <a:buSzPct val="100000"/>
               <a:buChar char="•"/>
             </a:pPr>
             <a:r>
-              <a:rPr lang="en-US" sz="1700" dirty="0">
+              <a:rPr lang="en-US" sz="1600" dirty="0">
                 <a:solidFill>
                   <a:srgbClr val="16233A"/>
                 </a:solidFill>
@@ -4571,20 +4571,20 @@
                 <a:ea typeface="Calibri" pitchFamily="34" charset="-122"/>
                 <a:cs typeface="Calibri" pitchFamily="34" charset="-120"/>
               </a:rPr>
-              <a:t>Custom agents: *.agent.md</a:t>
-            </a:r>
-            <a:endParaRPr lang="en-US" sz="1700" dirty="0"/>
+              <a:t>Custom agents: *.agent.md · Hooks: hooks.json · MCP: .mcp.json</a:t>
+            </a:r>
+            <a:endParaRPr lang="en-US" sz="1600" dirty="0"/>
           </a:p>
           <a:p>
             <a:pPr marL="203200" indent="-203200">
               <a:spcAft>
-                <a:spcPts val="1100"/>
+                <a:spcPts val="900"/>
               </a:spcAft>
               <a:buSzPct val="100000"/>
               <a:buChar char="•"/>
             </a:pPr>
             <a:r>
-              <a:rPr lang="en-US" sz="1700" dirty="0">
+              <a:rPr lang="en-US" sz="1600" dirty="0">
                 <a:solidFill>
                   <a:srgbClr val="16233A"/>
                 </a:solidFill>
@@ -4592,20 +4592,20 @@
                 <a:ea typeface="Calibri" pitchFamily="34" charset="-122"/>
                 <a:cs typeface="Calibri" pitchFamily="34" charset="-120"/>
               </a:rPr>
-              <a:t>Hooks: hooks.json · MCP: .mcp.json / mcp.json</a:t>
-            </a:r>
-            <a:endParaRPr lang="en-US" sz="1700" dirty="0"/>
+              <a:t>A marketplace = a repo with marketplace.json under .github/plugin.</a:t>
+            </a:r>
+            <a:endParaRPr lang="en-US" sz="1600" dirty="0"/>
           </a:p>
           <a:p>
             <a:pPr marL="203200" indent="-203200">
               <a:spcAft>
-                <a:spcPts val="1100"/>
+                <a:spcPts val="900"/>
               </a:spcAft>
               <a:buSzPct val="100000"/>
               <a:buChar char="•"/>
             </a:pPr>
             <a:r>
-              <a:rPr lang="en-US" sz="1700" dirty="0">
+              <a:rPr lang="en-US" sz="1600" dirty="0">
                 <a:solidFill>
                   <a:srgbClr val="16233A"/>
                 </a:solidFill>
@@ -4613,20 +4613,172 @@
                 <a:ea typeface="Calibri" pitchFamily="34" charset="-122"/>
                 <a:cs typeface="Calibri" pitchFamily="34" charset="-120"/>
               </a:rPr>
-              <a:t>Install: /plugin install owner/repo (Copilot CLI; repo must be a marketplace).</a:t>
-            </a:r>
-            <a:endParaRPr lang="en-US" sz="1700" dirty="0"/>
-          </a:p>
-          <a:p>
-            <a:pPr marL="203200" indent="-203200">
-              <a:spcAft>
-                <a:spcPts val="1100"/>
-              </a:spcAft>
-              <a:buSzPct val="100000"/>
-              <a:buChar char="•"/>
-            </a:pPr>
-            <a:r>
-              <a:rPr lang="en-US" sz="1700" dirty="0">
+              <a:t>Install from one (Copilot CLI) — PLUGIN@MARKETPLACE:</a:t>
+            </a:r>
+            <a:endParaRPr lang="en-US" sz="1600" dirty="0"/>
+          </a:p>
+        </p:txBody>
+      </p:sp>
+      <p:sp>
+        <p:nvSpPr>
+          <p:cNvPr id="5" name="Shape 3"/>
+          <p:cNvSpPr/>
+          <p:nvPr/>
+        </p:nvSpPr>
+        <p:spPr>
+          <a:xfrm>
+            <a:off x="548640" y="3429000"/>
+            <a:ext cx="11094415" cy="1417320"/>
+          </a:xfrm>
+          <a:prstGeom prst="roundRect">
+            <a:avLst>
+              <a:gd name="adj" fmla="val 3226"/>
+            </a:avLst>
+          </a:prstGeom>
+          <a:solidFill>
+            <a:srgbClr val="0D1B2E"/>
+          </a:solidFill>
+          <a:ln w="15875">
+            <a:solidFill>
+              <a:srgbClr val="00A3A3"/>
+            </a:solidFill>
+            <a:prstDash val="solid"/>
+          </a:ln>
+        </p:spPr>
+      </p:sp>
+      <p:sp>
+        <p:nvSpPr>
+          <p:cNvPr id="6" name="Text 4"/>
+          <p:cNvSpPr/>
+          <p:nvPr/>
+        </p:nvSpPr>
+        <p:spPr>
+          <a:xfrm>
+            <a:off x="676656" y="3474720"/>
+            <a:ext cx="10838383" cy="1325880"/>
+          </a:xfrm>
+          <a:prstGeom prst="rect">
+            <a:avLst/>
+          </a:prstGeom>
+          <a:noFill/>
+          <a:ln/>
+        </p:spPr>
+        <p:txBody>
+          <a:bodyPr wrap="square" lIns="0" tIns="0" rIns="0" bIns="0" rtlCol="0" anchor="ctr"/>
+          <a:lstStyle/>
+          <a:p>
+            <a:pPr algn="l" indent="0" marL="0">
+              <a:buNone/>
+            </a:pPr>
+            <a:r>
+              <a:rPr lang="en-US" sz="1100" dirty="0">
+                <a:solidFill>
+                  <a:srgbClr val="E8F0FF"/>
+                </a:solidFill>
+                <a:latin typeface="Consolas" pitchFamily="34" charset="0"/>
+                <a:ea typeface="Consolas" pitchFamily="34" charset="-122"/>
+                <a:cs typeface="Consolas" pitchFamily="34" charset="-120"/>
+              </a:rPr>
+              <a:t>/plugin marketplace add amilos/agentic-coding-101-marketplace</a:t>
+            </a:r>
+            <a:endParaRPr lang="en-US" sz="1100" dirty="0"/>
+          </a:p>
+          <a:p>
+            <a:pPr algn="l" indent="0" marL="0">
+              <a:buNone/>
+            </a:pPr>
+            <a:r>
+              <a:rPr lang="en-US" sz="1100" dirty="0">
+                <a:solidFill>
+                  <a:srgbClr val="E8F0FF"/>
+                </a:solidFill>
+                <a:latin typeface="Consolas" pitchFamily="34" charset="0"/>
+                <a:ea typeface="Consolas" pitchFamily="34" charset="-122"/>
+                <a:cs typeface="Consolas" pitchFamily="34" charset="-120"/>
+              </a:rPr>
+              <a:t>/plugin install addyosmani-agent-skills@agentic-coding-101-marketplace</a:t>
+            </a:r>
+            <a:endParaRPr lang="en-US" sz="1100" dirty="0"/>
+          </a:p>
+          <a:p>
+            <a:pPr algn="l" indent="0" marL="0">
+              <a:buNone/>
+            </a:pPr>
+            <a:r>
+              <a:rPr lang="en-US" sz="1100" dirty="0">
+                <a:solidFill>
+                  <a:srgbClr val="E8F0FF"/>
+                </a:solidFill>
+                <a:latin typeface="Consolas" pitchFamily="34" charset="0"/>
+                <a:ea typeface="Consolas" pitchFamily="34" charset="-122"/>
+                <a:cs typeface="Consolas" pitchFamily="34" charset="-120"/>
+              </a:rPr>
+              <a:t>/plugin install mattpocock-skills@agentic-coding-101-marketplace</a:t>
+            </a:r>
+            <a:endParaRPr lang="en-US" sz="1100" dirty="0"/>
+          </a:p>
+        </p:txBody>
+      </p:sp>
+      <p:sp>
+        <p:nvSpPr>
+          <p:cNvPr id="7" name="Shape 5"/>
+          <p:cNvSpPr/>
+          <p:nvPr/>
+        </p:nvSpPr>
+        <p:spPr>
+          <a:xfrm>
+            <a:off x="548640" y="5074920"/>
+            <a:ext cx="11094415" cy="960120"/>
+          </a:xfrm>
+          <a:prstGeom prst="roundRect">
+            <a:avLst>
+              <a:gd name="adj" fmla="val 7619"/>
+            </a:avLst>
+          </a:prstGeom>
+          <a:solidFill>
+            <a:srgbClr val="F3F7FF"/>
+          </a:solidFill>
+          <a:ln w="12700">
+            <a:solidFill>
+              <a:srgbClr val="D6E2F7"/>
+            </a:solidFill>
+            <a:prstDash val="solid"/>
+          </a:ln>
+          <a:effectLst>
+            <a:outerShdw sx="100000" sy="100000" kx="0" ky="0" algn="bl" rotWithShape="0" blurRad="76200" dist="25400" dir="5400000">
+              <a:srgbClr val="8AA0C0">
+                <a:alpha val="22000"/>
+              </a:srgbClr>
+            </a:outerShdw>
+          </a:effectLst>
+        </p:spPr>
+      </p:sp>
+      <p:sp>
+        <p:nvSpPr>
+          <p:cNvPr id="8" name="Text 6"/>
+          <p:cNvSpPr/>
+          <p:nvPr/>
+        </p:nvSpPr>
+        <p:spPr>
+          <a:xfrm>
+            <a:off x="713232" y="5239512"/>
+            <a:ext cx="10765231" cy="630936"/>
+          </a:xfrm>
+          <a:prstGeom prst="rect">
+            <a:avLst/>
+          </a:prstGeom>
+          <a:noFill/>
+          <a:ln/>
+        </p:spPr>
+        <p:txBody>
+          <a:bodyPr wrap="square" lIns="0" tIns="0" rIns="0" bIns="0" rtlCol="0" anchor="ctr"/>
+          <a:lstStyle/>
+          <a:p>
+            <a:pPr algn="l" indent="0" marL="0">
+              <a:buNone/>
+            </a:pPr>
+            <a:r>
+              <a:rPr lang="en-US" sz="1300" dirty="0">
                 <a:solidFill>
                   <a:srgbClr val="16233A"/>
                 </a:solidFill>
@@ -4634,9 +4786,9 @@
                 <a:ea typeface="Calibri" pitchFamily="34" charset="-122"/>
                 <a:cs typeface="Calibri" pitchFamily="34" charset="-120"/>
               </a:rPr>
-              <a:t>App enables plugins via .github/copilot/settings.json.</a:t>
-            </a:r>
-            <a:endParaRPr lang="en-US" sz="1700" dirty="0"/>
+              <a:t>Course marketplace bundles Addy Osmani's (24) + Matt Pocock's (39) skills as two plugins — MIT, redistributed with attribution.</a:t>
+            </a:r>
+            <a:endParaRPr lang="en-US" sz="1300" dirty="0"/>
           </a:p>
         </p:txBody>
       </p:sp>

--- a/slides/agentic-coding-101.pptx
+++ b/slides/agentic-coding-101.pptx
@@ -710,7 +710,7 @@
           <a:p>
             <a:r>
               <a:rPr lang="en-US" dirty="0"/>
-              <a:t>We publish a real marketplace, amilos/agentic-coding-101-marketplace, bundling Addy Osmani's (24) and Matt Pocock's (39) skills as two plugins — MIT, redistributed with attribution. Two commands and every session in the repo gains ~60 community skills. A plain skills repo is NOT a marketplace (no marketplace.json), which is why /plugin install owner/repo fails for those. The app can also enable plugins declaratively via .github/copilot/settings.json. The demo-repo ships a sample security-reviewer.agent.md to show the shape of a custom agent.</a:t>
+              <a:t>We publish a real marketplace, amilos/agentic-coding-101-marketplace, bundling Addy Osmani's (24) and Matt Pocock's (39) skills as two plugins — MIT, redistributed with attribution. Do it live in the app GUI: Settings → Plugins → Install → Add Marketplace, enter the owner/repo, then click Install on each listed plugin. A plain skills repo is NOT a marketplace (no marketplace.json), so it will not show up here. A few clicks and every session in the repo gains ~60 community skills. The demo-repo ships a sample security-reviewer.agent.md to show the shape of a custom agent.</a:t>
             </a:r>
             <a:endParaRPr lang="en-US" dirty="0"/>
           </a:p>
@@ -4613,7 +4613,7 @@
                 <a:ea typeface="Calibri" pitchFamily="34" charset="-122"/>
                 <a:cs typeface="Calibri" pitchFamily="34" charset="-120"/>
               </a:rPr>
-              <a:t>Install from one (Copilot CLI) — PLUGIN@MARKETPLACE:</a:t>
+              <a:t>Add &amp; install right in the app — Settings → Plugins:</a:t>
             </a:r>
             <a:endParaRPr lang="en-US" sz="1600" dirty="0"/>
           </a:p>
@@ -4679,7 +4679,7 @@
                 <a:ea typeface="Consolas" pitchFamily="34" charset="-122"/>
                 <a:cs typeface="Consolas" pitchFamily="34" charset="-120"/>
               </a:rPr>
-              <a:t>/plugin marketplace add amilos/agentic-coding-101-marketplace</a:t>
+              <a:t>Settings → Plugins → Install → Add Marketplace</a:t>
             </a:r>
             <a:endParaRPr lang="en-US" sz="1100" dirty="0"/>
           </a:p>
@@ -4696,7 +4696,7 @@
                 <a:ea typeface="Consolas" pitchFamily="34" charset="-122"/>
                 <a:cs typeface="Consolas" pitchFamily="34" charset="-120"/>
               </a:rPr>
-              <a:t>/plugin install addyosmani-agent-skills@agentic-coding-101-marketplace</a:t>
+              <a:t>   amilos/agentic-coding-101-marketplace</a:t>
             </a:r>
             <a:endParaRPr lang="en-US" sz="1100" dirty="0"/>
           </a:p>
@@ -4713,7 +4713,24 @@
                 <a:ea typeface="Consolas" pitchFamily="34" charset="-122"/>
                 <a:cs typeface="Consolas" pitchFamily="34" charset="-120"/>
               </a:rPr>
-              <a:t>/plugin install mattpocock-skills@agentic-coding-101-marketplace</a:t>
+              <a:t>→ Install:  addyosmani-agent-skills</a:t>
+            </a:r>
+            <a:endParaRPr lang="en-US" sz="1100" dirty="0"/>
+          </a:p>
+          <a:p>
+            <a:pPr algn="l" indent="0" marL="0">
+              <a:buNone/>
+            </a:pPr>
+            <a:r>
+              <a:rPr lang="en-US" sz="1100" dirty="0">
+                <a:solidFill>
+                  <a:srgbClr val="E8F0FF"/>
+                </a:solidFill>
+                <a:latin typeface="Consolas" pitchFamily="34" charset="0"/>
+                <a:ea typeface="Consolas" pitchFamily="34" charset="-122"/>
+                <a:cs typeface="Consolas" pitchFamily="34" charset="-120"/>
+              </a:rPr>
+              <a:t>→ Install:  mattpocock-skills</a:t>
             </a:r>
             <a:endParaRPr lang="en-US" sz="1100" dirty="0"/>
           </a:p>

--- a/slides/agentic-coding-101.pptx
+++ b/slides/agentic-coding-101.pptx
@@ -1326,7 +1326,7 @@
           <a:p>
             <a:r>
               <a:rPr lang="en-US" dirty="0"/>
-              <a:t>The core implement loop. Assign issue #1 to a session, review the diff before applying. This is also where a sharp eye catches the planted non-positive-amount bug.</a:t>
+              <a:t>The core implement loop. Assign issue #1 to a session, review the diff on the Canvas, then open a PR from the session for Station 7. A sharp eye may also spot the planted non-positive-amount bug here.</a:t>
             </a:r>
             <a:endParaRPr lang="en-US" dirty="0"/>
           </a:p>
@@ -1414,7 +1414,7 @@
           <a:p>
             <a:r>
               <a:rPr lang="en-US" dirty="0"/>
-              <a:t>Model the habit: "show me the diff before applying." Review on the canvas, then approve. Point out that the tests only cover the limit — the negative-amount bug is still lurking (we hunt it in Station 6/QA). Micro-exercise: run it, read the diff.</a:t>
+              <a:t>The Canvas shows the session's diff by default (no need to ask for it) — review it, approve, then open a PR from the session; Station 7 reviews and merges it. The tests only cover the limit; the negative-amount bug is still lurking (the Station 7 review catches it). Micro-exercise: run it, read the diff on the Canvas.</a:t>
             </a:r>
             <a:endParaRPr lang="en-US" dirty="0"/>
           </a:p>
@@ -1854,7 +1854,7 @@
           <a:p>
             <a:r>
               <a:rPr lang="en-US" dirty="0"/>
-              <a:t>Key message: agentic edits/refactors/test-gen work fine on Delphi because the app is repo/worktree-based — you just drive it from the app, not the IDE. The current InterestCalc has a rounding weakness (Trunc / no 2dp). DUnitX for logic, Appium+WinAppDriver for the Win32 statement screen (targets edtAccountId, btnLoad, lstStatement by Name).</a:t>
+              <a:t>Key message: agentic edits/refactors/test-gen work fine on Delphi because the app is repo/worktree-based — you just drive it from the app, not the IDE. The current InterestCalc has a rounding weakness (Trunc / no 2dp). DUnitX for logic, Appium+NovaWindows for the Win32 statement screen (targets edtAccountId, btnLoad, lstStatement by Name).</a:t>
             </a:r>
             <a:endParaRPr lang="en-US" dirty="0"/>
           </a:p>
@@ -2030,7 +2030,7 @@
           <a:p>
             <a:r>
               <a:rPr lang="en-US" dirty="0"/>
-              <a:t>The repo ships a starter pii-redaction-check/SKILL.md (frontmatter + TODO body). Attendees fill the body, install and invoke it. Debrief: skills encode house rules once, reuse everywhere. QA lens: running review here surfaces the planted bug.</a:t>
+              <a:t>The repo ships a starter pii-redaction-check/SKILL.md (frontmatter + TODO body). Attendees fill the body, install and invoke it. It flags PII reaching logs/console/messages (e.g. account ids in TransferResult.Fail messages) — NOT a logic check, so it will not find the non-positive-amount bug (that surfaces in the Station 7 review). Debrief: skills encode house rules once, reuse everywhere.</a:t>
             </a:r>
             <a:endParaRPr lang="en-US" dirty="0"/>
           </a:p>
@@ -2734,7 +2734,7 @@
           <a:p>
             <a:r>
               <a:rPr lang="en-US" dirty="0"/>
-              <a:t>The most important slide for a bank audience. Trainer tips: (1) always demo "show me the diff before applying"; (2) never merge without a human gate; (3) remind that the banking-review skill and security-reviewer agent exist to make review consistent. Tie back to the planted bug: tooling helps, but judgement ships.</a:t>
+              <a:t>The most important slide for a bank audience. Trainer tips: (1) always demo reading the Canvas diff before applying; (2) never merge without a human gate; (3) remind that the banking-review skill and security-reviewer agent exist to make review consistent. Tie back to the planted bug: tooling helps, but judgement ships.</a:t>
             </a:r>
             <a:endParaRPr lang="en-US" dirty="0"/>
           </a:p>
@@ -6523,7 +6523,7 @@
                 <a:ea typeface="Consolas" pitchFamily="34" charset="-122"/>
                 <a:cs typeface="Consolas" pitchFamily="34" charset="-120"/>
               </a:rPr>
-              <a:t>Using the requirements-to-tasks skill, read ISSUES.md issue #1 and produce a structured task list with acceptance criteria and the files likely to change.</a:t>
+              <a:t>Using the planning-and-task-breakdown skill, read ISSUES.md issue #1 and produce a structured task list with acceptance criteria and the files likely to change.</a:t>
             </a:r>
             <a:endParaRPr lang="en-US" sz="1100" dirty="0"/>
           </a:p>
@@ -7252,7 +7252,7 @@
                 <a:ea typeface="Calibri" pitchFamily="34" charset="-122"/>
                 <a:cs typeface="Calibri" pitchFamily="34" charset="-120"/>
               </a:rPr>
-              <a:t>Assign an issue to an agent session; multi-file feature in PaymentService.</a:t>
+              <a:t>Assign an issue to an agent session; multi-file feature in PaymentService; open a PR.</a:t>
             </a:r>
             <a:endParaRPr lang="en-US" sz="1600" dirty="0"/>
           </a:p>
@@ -7471,7 +7471,7 @@
                 <a:ea typeface="Consolas" pitchFamily="34" charset="-122"/>
                 <a:cs typeface="Consolas" pitchFamily="34" charset="-120"/>
               </a:rPr>
-              <a:t>Implement ISSUES.md issue #1 (daily transfer limit) across PaymentService. Update TransferService and add xUnit tests. Show me the diff before applying.</a:t>
+              <a:t>Implement ISSUES.md issue #1 (daily transfer limit) across PaymentService. Update TransferService and add xUnit tests.</a:t>
             </a:r>
             <a:endParaRPr lang="en-US" sz="1100" dirty="0"/>
           </a:p>
@@ -7510,7 +7510,7 @@
                 <a:ea typeface="Calibri" pitchFamily="34" charset="-122"/>
                 <a:cs typeface="Calibri" pitchFamily="34" charset="-120"/>
               </a:rPr>
-              <a:t>Expected: multi-file diff + new passing tests. Fallback: completed branch station-3.</a:t>
+              <a:t>Expected: multi-file diff + new passing tests; open a PR from the session for Station 7. Fallback: completed branch station-3.</a:t>
             </a:r>
             <a:endParaRPr lang="en-US" sz="1250" dirty="0"/>
           </a:p>
@@ -8485,7 +8485,7 @@
                 <a:ea typeface="Consolas" pitchFamily="34" charset="-122"/>
                 <a:cs typeface="Consolas" pitchFamily="34" charset="-120"/>
               </a:rPr>
-              <a:t>Add a nullable Reference column to LedgerEntries using Atlas declarative schema (atlas/schema.hcl) and generate the migration.</a:t>
+              <a:t>In atlas/schema.hcl, add a nullable Reference column of type nvarchar(140) to the LedgerEntries table, then generate the migration with atlas migrate diff.</a:t>
             </a:r>
             <a:endParaRPr lang="en-US" sz="1100" dirty="0"/>
           </a:p>
@@ -8950,7 +8950,7 @@
                 <a:ea typeface="Calibri" pitchFamily="34" charset="-122"/>
                 <a:cs typeface="Calibri" pitchFamily="34" charset="-120"/>
               </a:rPr>
-              <a:t>Explain &amp; refactor InterestCalc; DUnitX tests; Appium/WinAppDriver UI test.</a:t>
+              <a:t>Explain &amp; refactor InterestCalc; DUnitX tests; Appium/NovaWindows UI test.</a:t>
             </a:r>
             <a:endParaRPr lang="en-US" sz="1600" dirty="0"/>
           </a:p>
@@ -9313,7 +9313,7 @@
                 <a:ea typeface="Calibri" pitchFamily="34" charset="-122"/>
                 <a:cs typeface="Calibri" pitchFamily="34" charset="-120"/>
               </a:rPr>
-              <a:t>5c — Appium + WinAppDriver UI test</a:t>
+              <a:t>5c — Appium + NovaWindows UI test</a:t>
             </a:r>
             <a:endParaRPr lang="en-US" sz="1250" dirty="0"/>
           </a:p>
@@ -9379,7 +9379,7 @@
                 <a:ea typeface="Consolas" pitchFamily="34" charset="-122"/>
                 <a:cs typeface="Consolas" pitchFamily="34" charset="-120"/>
               </a:rPr>
-              <a:t>Scaffold an Appium + WinAppDriver test that loads a statement for account 1001 in StatementViewer and asserts the list is populated.</a:t>
+              <a:t>Scaffold an Appium + NovaWindows test that loads a statement for account 1001 in StatementViewer and asserts the list is populated.</a:t>
             </a:r>
             <a:endParaRPr lang="en-US" sz="1100" dirty="0"/>
           </a:p>
@@ -9787,7 +9787,7 @@
                 <a:ea typeface="Calibri" pitchFamily="34" charset="-122"/>
                 <a:cs typeface="Calibri" pitchFamily="34" charset="-120"/>
               </a:rPr>
-              <a:t>Complete the starter skill, then run it over the code — and watch it flag the non-positive-amount path.</a:t>
+              <a:t>Complete the starter skill, then run it over the code — watch it flag account numbers reaching logs, console or messages.</a:t>
             </a:r>
             <a:endParaRPr lang="en-US" sz="1600" dirty="0"/>
           </a:p>

--- a/slides/agentic-coding-101.pptx
+++ b/slides/agentic-coding-101.pptx
@@ -622,7 +622,7 @@
           <a:p>
             <a:r>
               <a:rPr lang="en-US" dirty="0"/>
-              <a:t>In the tour (0:10–0:25) we install Addy Osmani's agent-skills together so everyone has a shared, real library. Skills are the lightest customisation: a markdown file with frontmatter. Attendees author their own in Station 6.</a:t>
+              <a:t>Two ways to get skills into a repo: drop folders under .github/skills/ (the app reads them), or install a plugin from a marketplace (next slide). In the tour (0:10–0:25) we install from our own marketplace, amilos/agentic-coding-101-marketplace, which bundles Addy Osmani's and Matt Pocock's packs. Attendees author their own in Station 6.</a:t>
             </a:r>
             <a:endParaRPr lang="en-US" dirty="0"/>
           </a:p>
@@ -710,7 +710,7 @@
           <a:p>
             <a:r>
               <a:rPr lang="en-US" dirty="0"/>
-              <a:t>Plugins are how a bank platform team packages house rules and ships them to everyone with one install command. The demo-repo ships a sample security-reviewer.agent.md to show the shape of a custom agent.</a:t>
+              <a:t>We publish a real marketplace, amilos/agentic-coding-101-marketplace, bundling Addy Osmani's (24) and Matt Pocock's (39) skills as two plugins — MIT, redistributed with attribution. Do it live in the app GUI: Settings → Plugins → Install → Add Marketplace, enter the owner/repo, then click Install on each listed plugin. A plain skills repo is NOT a marketplace (no marketplace.json), so it will not show up here. A few clicks and every session in the repo gains ~60 community skills. The demo-repo ships a sample security-reviewer.agent.md to show the shape of a custom agent.</a:t>
             </a:r>
             <a:endParaRPr lang="en-US" dirty="0"/>
           </a:p>
@@ -1326,7 +1326,7 @@
           <a:p>
             <a:r>
               <a:rPr lang="en-US" dirty="0"/>
-              <a:t>The core implement loop. Assign issue #1 to a session, review the diff before applying. This is also where a sharp eye catches the planted non-positive-amount bug.</a:t>
+              <a:t>The core implement loop. Assign issue #1 to a session, review the diff on the Canvas, then open a PR from the session for Station 7. A sharp eye may also spot the planted non-positive-amount bug here.</a:t>
             </a:r>
             <a:endParaRPr lang="en-US" dirty="0"/>
           </a:p>
@@ -1414,7 +1414,7 @@
           <a:p>
             <a:r>
               <a:rPr lang="en-US" dirty="0"/>
-              <a:t>Model the habit: "show me the diff before applying." Review on the canvas, then approve. Point out that the tests only cover the limit — the negative-amount bug is still lurking (we hunt it in Station 6/QA). Micro-exercise: run it, read the diff.</a:t>
+              <a:t>The Canvas shows the session's diff by default (no need to ask for it) — review it, approve, then open a PR from the session; Station 7 reviews and merges it. The tests only cover the limit; the negative-amount bug is still lurking (the Station 7 review catches it). Micro-exercise: run it, read the diff on the Canvas.</a:t>
             </a:r>
             <a:endParaRPr lang="en-US" dirty="0"/>
           </a:p>
@@ -1854,7 +1854,7 @@
           <a:p>
             <a:r>
               <a:rPr lang="en-US" dirty="0"/>
-              <a:t>Key message: agentic edits/refactors/test-gen work fine on Delphi because the app is repo/worktree-based — you just drive it from the app, not the IDE. The current InterestCalc has a rounding weakness (Trunc / no 2dp). DUnitX for logic, Appium+WinAppDriver for the Win32 statement screen (targets edtAccountId, btnLoad, lstStatement by Name).</a:t>
+              <a:t>Key message: agentic edits/refactors/test-gen work fine on Delphi because the app is repo/worktree-based — you just drive it from the app, not the IDE. The current InterestCalc has a rounding weakness (Trunc / no 2dp). DUnitX for logic, Appium+NovaWindows for the Win32 statement screen (targets edtAccountId, btnLoad, lstStatement by Name).</a:t>
             </a:r>
             <a:endParaRPr lang="en-US" dirty="0"/>
           </a:p>
@@ -2030,7 +2030,7 @@
           <a:p>
             <a:r>
               <a:rPr lang="en-US" dirty="0"/>
-              <a:t>The repo ships a starter pii-redaction-check/SKILL.md (frontmatter + TODO body). Attendees fill the body, install and invoke it. Debrief: skills encode house rules once, reuse everywhere. QA lens: running review here surfaces the planted bug.</a:t>
+              <a:t>The repo ships a starter pii-redaction-check/SKILL.md (frontmatter + TODO body). Attendees fill the body, install and invoke it. It flags PII reaching logs/console/messages (e.g. account ids in TransferResult.Fail messages) — NOT a logic check, so it will not find the non-positive-amount bug (that surfaces in the Station 7 review). Debrief: skills encode house rules once, reuse everywhere.</a:t>
             </a:r>
             <a:endParaRPr lang="en-US" dirty="0"/>
           </a:p>
@@ -2734,7 +2734,7 @@
           <a:p>
             <a:r>
               <a:rPr lang="en-US" dirty="0"/>
-              <a:t>The most important slide for a bank audience. Trainer tips: (1) always demo "show me the diff before applying"; (2) never merge without a human gate; (3) remind that the banking-review skill and security-reviewer agent exist to make review consistent. Tie back to the planted bug: tooling helps, but judgement ships.</a:t>
+              <a:t>The most important slide for a bank audience. Trainer tips: (1) always demo reading the Canvas diff before applying; (2) never merge without a human gate; (3) remind that the banking-review skill and security-reviewer agent exist to make review consistent. Tie back to the planted bug: tooling helps, but judgement ships.</a:t>
             </a:r>
             <a:endParaRPr lang="en-US" dirty="0"/>
           </a:p>
@@ -4178,8 +4178,8 @@
         </p:nvSpPr>
         <p:spPr>
           <a:xfrm>
-            <a:off x="548640" y="2057400"/>
-            <a:ext cx="11094415" cy="2011680"/>
+            <a:off x="548640" y="2011680"/>
+            <a:ext cx="11094415" cy="2148840"/>
           </a:xfrm>
           <a:prstGeom prst="rect">
             <a:avLst/>
@@ -4193,13 +4193,13 @@
           <a:p>
             <a:pPr marL="203200" indent="-203200">
               <a:spcAft>
-                <a:spcPts val="800"/>
+                <a:spcPts val="700"/>
               </a:spcAft>
               <a:buSzPct val="100000"/>
               <a:buChar char="•"/>
             </a:pPr>
             <a:r>
-              <a:rPr lang="en-US" sz="1600" dirty="0">
+              <a:rPr lang="en-US" sz="1500" dirty="0">
                 <a:solidFill>
                   <a:srgbClr val="16233A"/>
                 </a:solidFill>
@@ -4209,18 +4209,18 @@
               </a:rPr>
               <a:t>A SKILL.md with YAML frontmatter (name, description).</a:t>
             </a:r>
-            <a:endParaRPr lang="en-US" sz="1600" dirty="0"/>
+            <a:endParaRPr lang="en-US" sz="1500" dirty="0"/>
           </a:p>
           <a:p>
             <a:pPr marL="203200" indent="-203200">
               <a:spcAft>
-                <a:spcPts val="800"/>
+                <a:spcPts val="700"/>
               </a:spcAft>
               <a:buSzPct val="100000"/>
               <a:buChar char="•"/>
             </a:pPr>
             <a:r>
-              <a:rPr lang="en-US" sz="1600" dirty="0">
+              <a:rPr lang="en-US" sz="1500" dirty="0">
                 <a:solidFill>
                   <a:srgbClr val="16233A"/>
                 </a:solidFill>
@@ -4230,18 +4230,18 @@
               </a:rPr>
               <a:t>Loaded on demand when the task matches.</a:t>
             </a:r>
-            <a:endParaRPr lang="en-US" sz="1600" dirty="0"/>
+            <a:endParaRPr lang="en-US" sz="1500" dirty="0"/>
           </a:p>
           <a:p>
             <a:pPr marL="203200" indent="-203200">
               <a:spcAft>
-                <a:spcPts val="800"/>
+                <a:spcPts val="700"/>
               </a:spcAft>
               <a:buSzPct val="100000"/>
               <a:buChar char="•"/>
             </a:pPr>
             <a:r>
-              <a:rPr lang="en-US" sz="1600" dirty="0">
+              <a:rPr lang="en-US" sz="1500" dirty="0">
                 <a:solidFill>
                   <a:srgbClr val="16233A"/>
                 </a:solidFill>
@@ -4251,7 +4251,28 @@
               </a:rPr>
               <a:t>Community: Addy Osmani agent-skills (24 lifecycle skills), Matt Pocock short-form skills, github/awesome-copilot.</a:t>
             </a:r>
-            <a:endParaRPr lang="en-US" sz="1600" dirty="0"/>
+            <a:endParaRPr lang="en-US" sz="1500" dirty="0"/>
+          </a:p>
+          <a:p>
+            <a:pPr marL="203200" indent="-203200">
+              <a:spcAft>
+                <a:spcPts val="700"/>
+              </a:spcAft>
+              <a:buSzPct val="100000"/>
+              <a:buChar char="•"/>
+            </a:pPr>
+            <a:r>
+              <a:rPr lang="en-US" sz="1500" dirty="0">
+                <a:solidFill>
+                  <a:srgbClr val="16233A"/>
+                </a:solidFill>
+                <a:latin typeface="Calibri" pitchFamily="34" charset="0"/>
+                <a:ea typeface="Calibri" pitchFamily="34" charset="-122"/>
+                <a:cs typeface="Calibri" pitchFamily="34" charset="-120"/>
+              </a:rPr>
+              <a:t>Get them two ways: copy folders into .github/skills/, or install a plugin from a marketplace (next slide).</a:t>
+            </a:r>
+            <a:endParaRPr lang="en-US" sz="1500" dirty="0"/>
           </a:p>
         </p:txBody>
       </p:sp>
@@ -4263,12 +4284,12 @@
         </p:nvSpPr>
         <p:spPr>
           <a:xfrm>
-            <a:off x="548640" y="4297680"/>
-            <a:ext cx="11094415" cy="1280160"/>
+            <a:off x="548640" y="4343400"/>
+            <a:ext cx="11094415" cy="1234440"/>
           </a:xfrm>
           <a:prstGeom prst="roundRect">
             <a:avLst>
-              <a:gd name="adj" fmla="val 3571"/>
+              <a:gd name="adj" fmla="val 3704"/>
             </a:avLst>
           </a:prstGeom>
           <a:solidFill>
@@ -4290,8 +4311,8 @@
         </p:nvSpPr>
         <p:spPr>
           <a:xfrm>
-            <a:off x="676656" y="4343400"/>
-            <a:ext cx="10838383" cy="1188720"/>
+            <a:off x="676656" y="4389120"/>
+            <a:ext cx="10838383" cy="1143000"/>
           </a:xfrm>
           <a:prstGeom prst="rect">
             <a:avLst/>
@@ -4468,8 +4489,8 @@
         </p:nvSpPr>
         <p:spPr>
           <a:xfrm>
-            <a:off x="548640" y="1371600"/>
-            <a:ext cx="11094415" cy="502920"/>
+            <a:off x="548640" y="1325880"/>
+            <a:ext cx="11094415" cy="457200"/>
           </a:xfrm>
           <a:prstGeom prst="rect">
             <a:avLst/>
@@ -4485,7 +4506,7 @@
               <a:buNone/>
             </a:pPr>
             <a:r>
-              <a:rPr lang="en-US" sz="1800" b="1" dirty="0">
+              <a:rPr lang="en-US" sz="1700" b="1" dirty="0">
                 <a:solidFill>
                   <a:srgbClr val="1C5DC4"/>
                 </a:solidFill>
@@ -4499,7 +4520,7 @@
               <a:buNone/>
             </a:pPr>
             <a:r>
-              <a:rPr lang="en-US" sz="1800" dirty="0">
+              <a:rPr lang="en-US" sz="1700" dirty="0">
                 <a:solidFill>
                   <a:srgbClr val="16233A"/>
                 </a:solidFill>
@@ -4509,7 +4530,7 @@
               </a:rPr>
               <a:t> bundle custom agents, skills, hooks, MCP servers and LSP configs.</a:t>
             </a:r>
-            <a:endParaRPr lang="en-US" sz="1800" dirty="0"/>
+            <a:endParaRPr lang="en-US" sz="1700" dirty="0"/>
           </a:p>
         </p:txBody>
       </p:sp>
@@ -4521,8 +4542,8 @@
         </p:nvSpPr>
         <p:spPr>
           <a:xfrm>
-            <a:off x="548640" y="2194560"/>
-            <a:ext cx="11094415" cy="2743200"/>
+            <a:off x="548640" y="1920240"/>
+            <a:ext cx="11094415" cy="1417320"/>
           </a:xfrm>
           <a:prstGeom prst="rect">
             <a:avLst/>
@@ -4536,13 +4557,13 @@
           <a:p>
             <a:pPr marL="203200" indent="-203200">
               <a:spcAft>
-                <a:spcPts val="1200"/>
+                <a:spcPts val="900"/>
               </a:spcAft>
               <a:buSzPct val="100000"/>
               <a:buChar char="•"/>
             </a:pPr>
             <a:r>
-              <a:rPr lang="en-US" sz="1800" dirty="0">
+              <a:rPr lang="en-US" sz="1600" dirty="0">
                 <a:solidFill>
                   <a:srgbClr val="16233A"/>
                 </a:solidFill>
@@ -4550,20 +4571,20 @@
                 <a:ea typeface="Calibri" pitchFamily="34" charset="-122"/>
                 <a:cs typeface="Calibri" pitchFamily="34" charset="-120"/>
               </a:rPr>
-              <a:t>Custom agents: *.agent.md</a:t>
-            </a:r>
-            <a:endParaRPr lang="en-US" sz="1800" dirty="0"/>
+              <a:t>Custom agents: *.agent.md · Hooks: hooks.json · MCP: .mcp.json</a:t>
+            </a:r>
+            <a:endParaRPr lang="en-US" sz="1600" dirty="0"/>
           </a:p>
           <a:p>
             <a:pPr marL="203200" indent="-203200">
               <a:spcAft>
-                <a:spcPts val="1200"/>
+                <a:spcPts val="900"/>
               </a:spcAft>
               <a:buSzPct val="100000"/>
               <a:buChar char="•"/>
             </a:pPr>
             <a:r>
-              <a:rPr lang="en-US" sz="1800" dirty="0">
+              <a:rPr lang="en-US" sz="1600" dirty="0">
                 <a:solidFill>
                   <a:srgbClr val="16233A"/>
                 </a:solidFill>
@@ -4571,20 +4592,20 @@
                 <a:ea typeface="Calibri" pitchFamily="34" charset="-122"/>
                 <a:cs typeface="Calibri" pitchFamily="34" charset="-120"/>
               </a:rPr>
-              <a:t>Hooks: hooks.json · MCP: .mcp.json / mcp.json</a:t>
-            </a:r>
-            <a:endParaRPr lang="en-US" sz="1800" dirty="0"/>
+              <a:t>A marketplace = a repo with marketplace.json under .github/plugin.</a:t>
+            </a:r>
+            <a:endParaRPr lang="en-US" sz="1600" dirty="0"/>
           </a:p>
           <a:p>
             <a:pPr marL="203200" indent="-203200">
               <a:spcAft>
-                <a:spcPts val="1200"/>
+                <a:spcPts val="900"/>
               </a:spcAft>
               <a:buSzPct val="100000"/>
               <a:buChar char="•"/>
             </a:pPr>
             <a:r>
-              <a:rPr lang="en-US" sz="1800" dirty="0">
+              <a:rPr lang="en-US" sz="1600" dirty="0">
                 <a:solidFill>
                   <a:srgbClr val="16233A"/>
                 </a:solidFill>
@@ -4592,9 +4613,199 @@
                 <a:ea typeface="Calibri" pitchFamily="34" charset="-122"/>
                 <a:cs typeface="Calibri" pitchFamily="34" charset="-120"/>
               </a:rPr>
-              <a:t>Install: /plugin install owner/repo</a:t>
-            </a:r>
-            <a:endParaRPr lang="en-US" sz="1800" dirty="0"/>
+              <a:t>Add &amp; install right in the app — Settings → Plugins:</a:t>
+            </a:r>
+            <a:endParaRPr lang="en-US" sz="1600" dirty="0"/>
+          </a:p>
+        </p:txBody>
+      </p:sp>
+      <p:sp>
+        <p:nvSpPr>
+          <p:cNvPr id="5" name="Shape 3"/>
+          <p:cNvSpPr/>
+          <p:nvPr/>
+        </p:nvSpPr>
+        <p:spPr>
+          <a:xfrm>
+            <a:off x="548640" y="3429000"/>
+            <a:ext cx="11094415" cy="1417320"/>
+          </a:xfrm>
+          <a:prstGeom prst="roundRect">
+            <a:avLst>
+              <a:gd name="adj" fmla="val 3226"/>
+            </a:avLst>
+          </a:prstGeom>
+          <a:solidFill>
+            <a:srgbClr val="0D1B2E"/>
+          </a:solidFill>
+          <a:ln w="15875">
+            <a:solidFill>
+              <a:srgbClr val="00A3A3"/>
+            </a:solidFill>
+            <a:prstDash val="solid"/>
+          </a:ln>
+        </p:spPr>
+      </p:sp>
+      <p:sp>
+        <p:nvSpPr>
+          <p:cNvPr id="6" name="Text 4"/>
+          <p:cNvSpPr/>
+          <p:nvPr/>
+        </p:nvSpPr>
+        <p:spPr>
+          <a:xfrm>
+            <a:off x="676656" y="3474720"/>
+            <a:ext cx="10838383" cy="1325880"/>
+          </a:xfrm>
+          <a:prstGeom prst="rect">
+            <a:avLst/>
+          </a:prstGeom>
+          <a:noFill/>
+          <a:ln/>
+        </p:spPr>
+        <p:txBody>
+          <a:bodyPr wrap="square" lIns="0" tIns="0" rIns="0" bIns="0" rtlCol="0" anchor="ctr"/>
+          <a:lstStyle/>
+          <a:p>
+            <a:pPr algn="l" indent="0" marL="0">
+              <a:buNone/>
+            </a:pPr>
+            <a:r>
+              <a:rPr lang="en-US" sz="1100" dirty="0">
+                <a:solidFill>
+                  <a:srgbClr val="E8F0FF"/>
+                </a:solidFill>
+                <a:latin typeface="Consolas" pitchFamily="34" charset="0"/>
+                <a:ea typeface="Consolas" pitchFamily="34" charset="-122"/>
+                <a:cs typeface="Consolas" pitchFamily="34" charset="-120"/>
+              </a:rPr>
+              <a:t>Settings → Plugins → Install → Add Marketplace</a:t>
+            </a:r>
+            <a:endParaRPr lang="en-US" sz="1100" dirty="0"/>
+          </a:p>
+          <a:p>
+            <a:pPr algn="l" indent="0" marL="0">
+              <a:buNone/>
+            </a:pPr>
+            <a:r>
+              <a:rPr lang="en-US" sz="1100" dirty="0">
+                <a:solidFill>
+                  <a:srgbClr val="E8F0FF"/>
+                </a:solidFill>
+                <a:latin typeface="Consolas" pitchFamily="34" charset="0"/>
+                <a:ea typeface="Consolas" pitchFamily="34" charset="-122"/>
+                <a:cs typeface="Consolas" pitchFamily="34" charset="-120"/>
+              </a:rPr>
+              <a:t>   amilos/agentic-coding-101-marketplace</a:t>
+            </a:r>
+            <a:endParaRPr lang="en-US" sz="1100" dirty="0"/>
+          </a:p>
+          <a:p>
+            <a:pPr algn="l" indent="0" marL="0">
+              <a:buNone/>
+            </a:pPr>
+            <a:r>
+              <a:rPr lang="en-US" sz="1100" dirty="0">
+                <a:solidFill>
+                  <a:srgbClr val="E8F0FF"/>
+                </a:solidFill>
+                <a:latin typeface="Consolas" pitchFamily="34" charset="0"/>
+                <a:ea typeface="Consolas" pitchFamily="34" charset="-122"/>
+                <a:cs typeface="Consolas" pitchFamily="34" charset="-120"/>
+              </a:rPr>
+              <a:t>→ Install:  addyosmani-agent-skills</a:t>
+            </a:r>
+            <a:endParaRPr lang="en-US" sz="1100" dirty="0"/>
+          </a:p>
+          <a:p>
+            <a:pPr algn="l" indent="0" marL="0">
+              <a:buNone/>
+            </a:pPr>
+            <a:r>
+              <a:rPr lang="en-US" sz="1100" dirty="0">
+                <a:solidFill>
+                  <a:srgbClr val="E8F0FF"/>
+                </a:solidFill>
+                <a:latin typeface="Consolas" pitchFamily="34" charset="0"/>
+                <a:ea typeface="Consolas" pitchFamily="34" charset="-122"/>
+                <a:cs typeface="Consolas" pitchFamily="34" charset="-120"/>
+              </a:rPr>
+              <a:t>→ Install:  mattpocock-skills</a:t>
+            </a:r>
+            <a:endParaRPr lang="en-US" sz="1100" dirty="0"/>
+          </a:p>
+        </p:txBody>
+      </p:sp>
+      <p:sp>
+        <p:nvSpPr>
+          <p:cNvPr id="7" name="Shape 5"/>
+          <p:cNvSpPr/>
+          <p:nvPr/>
+        </p:nvSpPr>
+        <p:spPr>
+          <a:xfrm>
+            <a:off x="548640" y="5074920"/>
+            <a:ext cx="11094415" cy="960120"/>
+          </a:xfrm>
+          <a:prstGeom prst="roundRect">
+            <a:avLst>
+              <a:gd name="adj" fmla="val 7619"/>
+            </a:avLst>
+          </a:prstGeom>
+          <a:solidFill>
+            <a:srgbClr val="F3F7FF"/>
+          </a:solidFill>
+          <a:ln w="12700">
+            <a:solidFill>
+              <a:srgbClr val="D6E2F7"/>
+            </a:solidFill>
+            <a:prstDash val="solid"/>
+          </a:ln>
+          <a:effectLst>
+            <a:outerShdw sx="100000" sy="100000" kx="0" ky="0" algn="bl" rotWithShape="0" blurRad="76200" dist="25400" dir="5400000">
+              <a:srgbClr val="8AA0C0">
+                <a:alpha val="22000"/>
+              </a:srgbClr>
+            </a:outerShdw>
+          </a:effectLst>
+        </p:spPr>
+      </p:sp>
+      <p:sp>
+        <p:nvSpPr>
+          <p:cNvPr id="8" name="Text 6"/>
+          <p:cNvSpPr/>
+          <p:nvPr/>
+        </p:nvSpPr>
+        <p:spPr>
+          <a:xfrm>
+            <a:off x="713232" y="5239512"/>
+            <a:ext cx="10765231" cy="630936"/>
+          </a:xfrm>
+          <a:prstGeom prst="rect">
+            <a:avLst/>
+          </a:prstGeom>
+          <a:noFill/>
+          <a:ln/>
+        </p:spPr>
+        <p:txBody>
+          <a:bodyPr wrap="square" lIns="0" tIns="0" rIns="0" bIns="0" rtlCol="0" anchor="ctr"/>
+          <a:lstStyle/>
+          <a:p>
+            <a:pPr algn="l" indent="0" marL="0">
+              <a:buNone/>
+            </a:pPr>
+            <a:r>
+              <a:rPr lang="en-US" sz="1300" dirty="0">
+                <a:solidFill>
+                  <a:srgbClr val="16233A"/>
+                </a:solidFill>
+                <a:latin typeface="Calibri" pitchFamily="34" charset="0"/>
+                <a:ea typeface="Calibri" pitchFamily="34" charset="-122"/>
+                <a:cs typeface="Calibri" pitchFamily="34" charset="-120"/>
+              </a:rPr>
+              <a:t>Course marketplace bundles Addy Osmani's (24) + Matt Pocock's (39) skills as two plugins — MIT, redistributed with attribution.</a:t>
+            </a:r>
+            <a:endParaRPr lang="en-US" sz="1300" dirty="0"/>
           </a:p>
         </p:txBody>
       </p:sp>
@@ -6312,7 +6523,7 @@
                 <a:ea typeface="Consolas" pitchFamily="34" charset="-122"/>
                 <a:cs typeface="Consolas" pitchFamily="34" charset="-120"/>
               </a:rPr>
-              <a:t>Using the requirements-to-tasks skill, read ISSUES.md issue #1 and produce a structured task list with acceptance criteria and the files likely to change.</a:t>
+              <a:t>Using the planning-and-task-breakdown skill, read ISSUES.md issue #1 and produce a structured task list with acceptance criteria and the files likely to change.</a:t>
             </a:r>
             <a:endParaRPr lang="en-US" sz="1100" dirty="0"/>
           </a:p>
@@ -7041,7 +7252,7 @@
                 <a:ea typeface="Calibri" pitchFamily="34" charset="-122"/>
                 <a:cs typeface="Calibri" pitchFamily="34" charset="-120"/>
               </a:rPr>
-              <a:t>Assign an issue to an agent session; multi-file feature in PaymentService.</a:t>
+              <a:t>Assign an issue to an agent session; multi-file feature in PaymentService; open a PR.</a:t>
             </a:r>
             <a:endParaRPr lang="en-US" sz="1600" dirty="0"/>
           </a:p>
@@ -7260,7 +7471,7 @@
                 <a:ea typeface="Consolas" pitchFamily="34" charset="-122"/>
                 <a:cs typeface="Consolas" pitchFamily="34" charset="-120"/>
               </a:rPr>
-              <a:t>Implement ISSUES.md issue #1 (daily transfer limit) across PaymentService. Update TransferService and add xUnit tests. Show me the diff before applying.</a:t>
+              <a:t>Implement ISSUES.md issue #1 (daily transfer limit) across PaymentService. Update TransferService and add xUnit tests.</a:t>
             </a:r>
             <a:endParaRPr lang="en-US" sz="1100" dirty="0"/>
           </a:p>
@@ -7299,7 +7510,7 @@
                 <a:ea typeface="Calibri" pitchFamily="34" charset="-122"/>
                 <a:cs typeface="Calibri" pitchFamily="34" charset="-120"/>
               </a:rPr>
-              <a:t>Expected: multi-file diff + new passing tests. Fallback: completed branch station-3.</a:t>
+              <a:t>Expected: multi-file diff + new passing tests; open a PR from the session for Station 7. Fallback: completed branch station-3.</a:t>
             </a:r>
             <a:endParaRPr lang="en-US" sz="1250" dirty="0"/>
           </a:p>
@@ -8274,7 +8485,7 @@
                 <a:ea typeface="Consolas" pitchFamily="34" charset="-122"/>
                 <a:cs typeface="Consolas" pitchFamily="34" charset="-120"/>
               </a:rPr>
-              <a:t>Add a nullable Reference column to LedgerEntries using Atlas declarative schema (atlas/schema.hcl) and generate the migration.</a:t>
+              <a:t>In atlas/schema.hcl, add a nullable Reference column of type nvarchar(140) to the LedgerEntries table, then generate the migration with atlas migrate diff.</a:t>
             </a:r>
             <a:endParaRPr lang="en-US" sz="1100" dirty="0"/>
           </a:p>
@@ -8739,7 +8950,7 @@
                 <a:ea typeface="Calibri" pitchFamily="34" charset="-122"/>
                 <a:cs typeface="Calibri" pitchFamily="34" charset="-120"/>
               </a:rPr>
-              <a:t>Explain &amp; refactor InterestCalc; DUnitX tests; Appium/WinAppDriver UI test.</a:t>
+              <a:t>Explain &amp; refactor InterestCalc; DUnitX tests; Appium/NovaWindows UI test.</a:t>
             </a:r>
             <a:endParaRPr lang="en-US" sz="1600" dirty="0"/>
           </a:p>
@@ -9102,7 +9313,7 @@
                 <a:ea typeface="Calibri" pitchFamily="34" charset="-122"/>
                 <a:cs typeface="Calibri" pitchFamily="34" charset="-120"/>
               </a:rPr>
-              <a:t>5c — Appium + WinAppDriver UI test</a:t>
+              <a:t>5c — Appium + NovaWindows UI test</a:t>
             </a:r>
             <a:endParaRPr lang="en-US" sz="1250" dirty="0"/>
           </a:p>
@@ -9168,7 +9379,7 @@
                 <a:ea typeface="Consolas" pitchFamily="34" charset="-122"/>
                 <a:cs typeface="Consolas" pitchFamily="34" charset="-120"/>
               </a:rPr>
-              <a:t>Scaffold an Appium + WinAppDriver test that loads a statement for account 1001 in StatementViewer and asserts the list is populated.</a:t>
+              <a:t>Scaffold an Appium + NovaWindows test that loads a statement for account 1001 in StatementViewer and asserts the list is populated.</a:t>
             </a:r>
             <a:endParaRPr lang="en-US" sz="1100" dirty="0"/>
           </a:p>
@@ -9576,7 +9787,7 @@
                 <a:ea typeface="Calibri" pitchFamily="34" charset="-122"/>
                 <a:cs typeface="Calibri" pitchFamily="34" charset="-120"/>
               </a:rPr>
-              <a:t>Complete the starter skill, then run it over the code — and watch it flag the non-positive-amount path.</a:t>
+              <a:t>Complete the starter skill, then run it over the code — watch it flag account numbers reaching logs, console or messages.</a:t>
             </a:r>
             <a:endParaRPr lang="en-US" sz="1600" dirty="0"/>
           </a:p>

--- a/slides/agentic-coding-101.pptx
+++ b/slides/agentic-coding-101.pptx
@@ -2646,7 +2646,7 @@
           <a:p>
             <a:r>
               <a:rPr lang="en-US" dirty="0"/>
-              <a:t>OpenSpec (Fission-AI) is lightweight and brownfield-first; the propose/apply/archive verbs appear as slash-command prompt files. Spec Kit (github/spec-kit) is the heavier, template-driven, agent-agnostic alternative. Position them as two points on a spectrum, not competitors. Reuse add-transfer-limit so it mirrors the station work.</a:t>
+              <a:t>OpenSpec (Fission-AI) is lightweight and brownfield-first; the propose/apply/archive verbs appear as slash-command prompt files. Spec Kit (github/spec-kit) is the heavier, template-driven, agent-agnostic alternative. Starting point: the repo is OpenSpec-initialised and the daily limit is already shipped, so we build the next unbuilt feature — idempotent transfers, designed in Station 2's ADR 0001 and filed as issue #6; openspec propose reads that issue. Fallback: the pre-baked change on the demo repo's openspec branch.</a:t>
             </a:r>
             <a:endParaRPr lang="en-US" dirty="0"/>
           </a:p>
@@ -11588,7 +11588,7 @@
                 <a:ea typeface="Consolas" pitchFamily="34" charset="-122"/>
                 <a:cs typeface="Consolas" pitchFamily="34" charset="-120"/>
               </a:rPr>
-              <a:t>openspec propose add-transfer-limit</a:t>
+              <a:t>openspec propose add-idempotent-transfers</a:t>
             </a:r>
             <a:endParaRPr lang="en-US" sz="1100" dirty="0"/>
           </a:p>
@@ -11622,7 +11622,7 @@
                 <a:ea typeface="Consolas" pitchFamily="34" charset="-122"/>
                 <a:cs typeface="Consolas" pitchFamily="34" charset="-120"/>
               </a:rPr>
-              <a:t>openspec apply  add-transfer-limit</a:t>
+              <a:t>openspec apply  add-idempotent-transfers</a:t>
             </a:r>
             <a:endParaRPr lang="en-US" sz="1100" dirty="0"/>
           </a:p>
@@ -11639,7 +11639,7 @@
                 <a:ea typeface="Consolas" pitchFamily="34" charset="-122"/>
                 <a:cs typeface="Consolas" pitchFamily="34" charset="-120"/>
               </a:rPr>
-              <a:t>openspec archive add-transfer-limit</a:t>
+              <a:t>openspec archive add-idempotent-transfers</a:t>
             </a:r>
             <a:endParaRPr lang="en-US" sz="1100" dirty="0"/>
           </a:p>
